--- a/public/kit/decks/master.pptx
+++ b/public/kit/decks/master.pptx
@@ -2548,7 +2548,7 @@
     <p:bg>
       <p:bgPr>
         <a:solidFill>
-          <a:srgbClr val="0E1230"/>
+          <a:srgbClr val="161A24"/>
         </a:solidFill>
       </p:bgPr>
     </p:bg>
@@ -2568,7 +2568,7 @@
       </p:grpSpPr>
       <p:pic>
         <p:nvPicPr>
-          <p:cNvPr id="2" name="Image 0" descr="D:\startups\my-projects\DevUpProject\hirefromwebsite\public\images\deck-title.jpg">    </p:cNvPr>
+          <p:cNvPr id="2" name="Image 0" descr="C:\Users\Developer\Desktop\hirefromph\hirefromph\public\images\deck-title.jpg">    </p:cNvPr>
           <p:cNvPicPr>
             <a:picLocks noChangeAspect="1"/>
           </p:cNvPicPr>
@@ -2604,13 +2604,13 @@
             <a:avLst/>
           </a:prstGeom>
           <a:solidFill>
-            <a:srgbClr val="0E1230">
+            <a:srgbClr val="161A24">
               <a:alpha val="72000"/>
             </a:srgbClr>
           </a:solidFill>
           <a:ln w="12700">
             <a:solidFill>
-              <a:srgbClr val="0E1230">
+              <a:srgbClr val="161A24">
                 <a:alpha val="0"/>
               </a:srgbClr>
             </a:solidFill>
@@ -2645,7 +2645,7 @@
             <a:r>
               <a:rPr lang="en-US" sz="1400" b="1" spc="300" kern="0" dirty="0">
                 <a:solidFill>
-                  <a:srgbClr val="C9C8FF"/>
+                  <a:srgbClr val="AFC5EE"/>
                 </a:solidFill>
                 <a:latin typeface="Inter" pitchFamily="34" charset="0"/>
                 <a:ea typeface="Inter" pitchFamily="34" charset="-122"/>
@@ -2729,7 +2729,7 @@
             <a:r>
               <a:rPr lang="en-US" sz="2200" dirty="0">
                 <a:solidFill>
-                  <a:srgbClr val="D6D7EA"/>
+                  <a:srgbClr val="EAF0FB"/>
                 </a:solidFill>
                 <a:latin typeface="Inter" pitchFamily="34" charset="0"/>
                 <a:ea typeface="Inter" pitchFamily="34" charset="-122"/>
@@ -2768,7 +2768,7 @@
             <a:r>
               <a:rPr lang="en-US" sz="1100" dirty="0">
                 <a:solidFill>
-                  <a:srgbClr val="D6D7EA"/>
+                  <a:srgbClr val="EAF0FB"/>
                 </a:solidFill>
                 <a:latin typeface="Inter" pitchFamily="34" charset="0"/>
                 <a:ea typeface="Inter" pitchFamily="34" charset="-122"/>
@@ -2807,7 +2807,7 @@
             <a:r>
               <a:rPr lang="en-US" sz="1100" dirty="0">
                 <a:solidFill>
-                  <a:srgbClr val="D6D7EA"/>
+                  <a:srgbClr val="EAF0FB"/>
                 </a:solidFill>
                 <a:latin typeface="Inter" pitchFamily="34" charset="0"/>
                 <a:ea typeface="Inter" pitchFamily="34" charset="-122"/>
@@ -2853,7 +2853,7 @@
       </p:grpSpPr>
       <p:pic>
         <p:nvPicPr>
-          <p:cNvPr id="2" name="Image 0" descr="D:\startups\my-projects\DevUpProject\hirefromwebsite\public\images\deck\icons\deconstruct.png">    </p:cNvPr>
+          <p:cNvPr id="2" name="Image 0" descr="C:\Users\Developer\Desktop\hirefromph\hirefromph\public\images\deck\icons\deconstruct.png">    </p:cNvPr>
           <p:cNvPicPr>
             <a:picLocks noChangeAspect="1"/>
           </p:cNvPicPr>
@@ -2902,7 +2902,7 @@
             <a:r>
               <a:rPr lang="en-US" sz="1400" b="1" spc="300" kern="0" dirty="0">
                 <a:solidFill>
-                  <a:srgbClr val="4B4EF6"/>
+                  <a:srgbClr val="043882"/>
                 </a:solidFill>
                 <a:latin typeface="Inter" pitchFamily="34" charset="0"/>
                 <a:ea typeface="Inter" pitchFamily="34" charset="-122"/>
@@ -2944,7 +2944,7 @@
             <a:r>
               <a:rPr lang="en-US" sz="3800" b="1" dirty="0">
                 <a:solidFill>
-                  <a:srgbClr val="0E1230"/>
+                  <a:srgbClr val="161A24"/>
                 </a:solidFill>
                 <a:latin typeface="Inter" pitchFamily="34" charset="0"/>
                 <a:ea typeface="Inter" pitchFamily="34" charset="-122"/>
@@ -2988,7 +2988,7 @@
             <a:r>
               <a:rPr lang="en-US" sz="1700" dirty="0">
                 <a:solidFill>
-                  <a:srgbClr val="0E1230"/>
+                  <a:srgbClr val="161A24"/>
                 </a:solidFill>
                 <a:latin typeface="Inter" pitchFamily="34" charset="0"/>
                 <a:ea typeface="Inter" pitchFamily="34" charset="-122"/>
@@ -3010,7 +3010,7 @@
             <a:r>
               <a:rPr lang="en-US" sz="1700" dirty="0">
                 <a:solidFill>
-                  <a:srgbClr val="0E1230"/>
+                  <a:srgbClr val="161A24"/>
                 </a:solidFill>
                 <a:latin typeface="Inter" pitchFamily="34" charset="0"/>
                 <a:ea typeface="Inter" pitchFamily="34" charset="-122"/>
@@ -3032,7 +3032,7 @@
             <a:r>
               <a:rPr lang="en-US" sz="1700" dirty="0">
                 <a:solidFill>
-                  <a:srgbClr val="0E1230"/>
+                  <a:srgbClr val="161A24"/>
                 </a:solidFill>
                 <a:latin typeface="Inter" pitchFamily="34" charset="0"/>
                 <a:ea typeface="Inter" pitchFamily="34" charset="-122"/>
@@ -3059,11 +3059,11 @@
             <a:avLst/>
           </a:prstGeom>
           <a:solidFill>
-            <a:srgbClr val="EEEDFF"/>
+            <a:srgbClr val="EAF0FB"/>
           </a:solidFill>
           <a:ln w="12700">
             <a:solidFill>
-              <a:srgbClr val="EEEDFF"/>
+              <a:srgbClr val="EAF0FB"/>
             </a:solidFill>
             <a:prstDash val="solid"/>
           </a:ln>
@@ -3096,7 +3096,7 @@
             <a:r>
               <a:rPr lang="en-US" sz="1500" dirty="0">
                 <a:solidFill>
-                  <a:srgbClr val="0E1230"/>
+                  <a:srgbClr val="161A24"/>
                 </a:solidFill>
                 <a:latin typeface="Inter" pitchFamily="34" charset="0"/>
                 <a:ea typeface="Inter" pitchFamily="34" charset="-122"/>
@@ -3135,7 +3135,7 @@
             <a:r>
               <a:rPr lang="en-US" sz="1100" dirty="0">
                 <a:solidFill>
-                  <a:srgbClr val="6B7087"/>
+                  <a:srgbClr val="5F6575"/>
                 </a:solidFill>
                 <a:latin typeface="Inter" pitchFamily="34" charset="0"/>
                 <a:ea typeface="Inter" pitchFamily="34" charset="-122"/>
@@ -3174,7 +3174,7 @@
             <a:r>
               <a:rPr lang="en-US" sz="1100" dirty="0">
                 <a:solidFill>
-                  <a:srgbClr val="6B7087"/>
+                  <a:srgbClr val="5F6575"/>
                 </a:solidFill>
                 <a:latin typeface="Inter" pitchFamily="34" charset="0"/>
                 <a:ea typeface="Inter" pitchFamily="34" charset="-122"/>
@@ -3220,7 +3220,7 @@
       </p:grpSpPr>
       <p:pic>
         <p:nvPicPr>
-          <p:cNvPr id="2" name="Image 0" descr="D:\startups\my-projects\DevUpProject\hirefromwebsite\public\images\deck\icons\learn.png">    </p:cNvPr>
+          <p:cNvPr id="2" name="Image 0" descr="C:\Users\Developer\Desktop\hirefromph\hirefromph\public\images\deck\icons\learn.png">    </p:cNvPr>
           <p:cNvPicPr>
             <a:picLocks noChangeAspect="1"/>
           </p:cNvPicPr>
@@ -3269,7 +3269,7 @@
             <a:r>
               <a:rPr lang="en-US" sz="1400" b="1" spc="300" kern="0" dirty="0">
                 <a:solidFill>
-                  <a:srgbClr val="4B4EF6"/>
+                  <a:srgbClr val="043882"/>
                 </a:solidFill>
                 <a:latin typeface="Inter" pitchFamily="34" charset="0"/>
                 <a:ea typeface="Inter" pitchFamily="34" charset="-122"/>
@@ -3311,7 +3311,7 @@
             <a:r>
               <a:rPr lang="en-US" sz="3800" b="1" dirty="0">
                 <a:solidFill>
-                  <a:srgbClr val="0E1230"/>
+                  <a:srgbClr val="161A24"/>
                 </a:solidFill>
                 <a:latin typeface="Inter" pitchFamily="34" charset="0"/>
                 <a:ea typeface="Inter" pitchFamily="34" charset="-122"/>
@@ -3355,7 +3355,7 @@
             <a:r>
               <a:rPr lang="en-US" sz="1700" dirty="0">
                 <a:solidFill>
-                  <a:srgbClr val="0E1230"/>
+                  <a:srgbClr val="161A24"/>
                 </a:solidFill>
                 <a:latin typeface="Inter" pitchFamily="34" charset="0"/>
                 <a:ea typeface="Inter" pitchFamily="34" charset="-122"/>
@@ -3377,7 +3377,7 @@
             <a:r>
               <a:rPr lang="en-US" sz="1700" dirty="0">
                 <a:solidFill>
-                  <a:srgbClr val="0E1230"/>
+                  <a:srgbClr val="161A24"/>
                 </a:solidFill>
                 <a:latin typeface="Inter" pitchFamily="34" charset="0"/>
                 <a:ea typeface="Inter" pitchFamily="34" charset="-122"/>
@@ -3399,7 +3399,7 @@
             <a:r>
               <a:rPr lang="en-US" sz="1700" dirty="0">
                 <a:solidFill>
-                  <a:srgbClr val="0E1230"/>
+                  <a:srgbClr val="161A24"/>
                 </a:solidFill>
                 <a:latin typeface="Inter" pitchFamily="34" charset="0"/>
                 <a:ea typeface="Inter" pitchFamily="34" charset="-122"/>
@@ -3426,11 +3426,11 @@
             <a:avLst/>
           </a:prstGeom>
           <a:solidFill>
-            <a:srgbClr val="EEEDFF"/>
+            <a:srgbClr val="EAF0FB"/>
           </a:solidFill>
           <a:ln w="12700">
             <a:solidFill>
-              <a:srgbClr val="EEEDFF"/>
+              <a:srgbClr val="EAF0FB"/>
             </a:solidFill>
             <a:prstDash val="solid"/>
           </a:ln>
@@ -3463,7 +3463,7 @@
             <a:r>
               <a:rPr lang="en-US" sz="1500" dirty="0">
                 <a:solidFill>
-                  <a:srgbClr val="0E1230"/>
+                  <a:srgbClr val="161A24"/>
                 </a:solidFill>
                 <a:latin typeface="Inter" pitchFamily="34" charset="0"/>
                 <a:ea typeface="Inter" pitchFamily="34" charset="-122"/>
@@ -3502,7 +3502,7 @@
             <a:r>
               <a:rPr lang="en-US" sz="1100" dirty="0">
                 <a:solidFill>
-                  <a:srgbClr val="6B7087"/>
+                  <a:srgbClr val="5F6575"/>
                 </a:solidFill>
                 <a:latin typeface="Inter" pitchFamily="34" charset="0"/>
                 <a:ea typeface="Inter" pitchFamily="34" charset="-122"/>
@@ -3541,7 +3541,7 @@
             <a:r>
               <a:rPr lang="en-US" sz="1100" dirty="0">
                 <a:solidFill>
-                  <a:srgbClr val="6B7087"/>
+                  <a:srgbClr val="5F6575"/>
                 </a:solidFill>
                 <a:latin typeface="Inter" pitchFamily="34" charset="0"/>
                 <a:ea typeface="Inter" pitchFamily="34" charset="-122"/>
@@ -3587,7 +3587,7 @@
       </p:grpSpPr>
       <p:pic>
         <p:nvPicPr>
-          <p:cNvPr id="2" name="Image 0" descr="D:\startups\my-projects\DevUpProject\hirefromwebsite\public\images\deck\icons\vet.png">    </p:cNvPr>
+          <p:cNvPr id="2" name="Image 0" descr="C:\Users\Developer\Desktop\hirefromph\hirefromph\public\images\deck\icons\vet.png">    </p:cNvPr>
           <p:cNvPicPr>
             <a:picLocks noChangeAspect="1"/>
           </p:cNvPicPr>
@@ -3636,7 +3636,7 @@
             <a:r>
               <a:rPr lang="en-US" sz="1400" b="1" spc="300" kern="0" dirty="0">
                 <a:solidFill>
-                  <a:srgbClr val="4B4EF6"/>
+                  <a:srgbClr val="043882"/>
                 </a:solidFill>
                 <a:latin typeface="Inter" pitchFamily="34" charset="0"/>
                 <a:ea typeface="Inter" pitchFamily="34" charset="-122"/>
@@ -3678,7 +3678,7 @@
             <a:r>
               <a:rPr lang="en-US" sz="3800" b="1" dirty="0">
                 <a:solidFill>
-                  <a:srgbClr val="0E1230"/>
+                  <a:srgbClr val="161A24"/>
                 </a:solidFill>
                 <a:latin typeface="Inter" pitchFamily="34" charset="0"/>
                 <a:ea typeface="Inter" pitchFamily="34" charset="-122"/>
@@ -3722,7 +3722,7 @@
             <a:r>
               <a:rPr lang="en-US" sz="1700" dirty="0">
                 <a:solidFill>
-                  <a:srgbClr val="0E1230"/>
+                  <a:srgbClr val="161A24"/>
                 </a:solidFill>
                 <a:latin typeface="Inter" pitchFamily="34" charset="0"/>
                 <a:ea typeface="Inter" pitchFamily="34" charset="-122"/>
@@ -3744,7 +3744,7 @@
             <a:r>
               <a:rPr lang="en-US" sz="1700" dirty="0">
                 <a:solidFill>
-                  <a:srgbClr val="0E1230"/>
+                  <a:srgbClr val="161A24"/>
                 </a:solidFill>
                 <a:latin typeface="Inter" pitchFamily="34" charset="0"/>
                 <a:ea typeface="Inter" pitchFamily="34" charset="-122"/>
@@ -3766,7 +3766,7 @@
             <a:r>
               <a:rPr lang="en-US" sz="1700" dirty="0">
                 <a:solidFill>
-                  <a:srgbClr val="0E1230"/>
+                  <a:srgbClr val="161A24"/>
                 </a:solidFill>
                 <a:latin typeface="Inter" pitchFamily="34" charset="0"/>
                 <a:ea typeface="Inter" pitchFamily="34" charset="-122"/>
@@ -3793,11 +3793,11 @@
             <a:avLst/>
           </a:prstGeom>
           <a:solidFill>
-            <a:srgbClr val="EEEDFF"/>
+            <a:srgbClr val="EAF0FB"/>
           </a:solidFill>
           <a:ln w="12700">
             <a:solidFill>
-              <a:srgbClr val="EEEDFF"/>
+              <a:srgbClr val="EAF0FB"/>
             </a:solidFill>
             <a:prstDash val="solid"/>
           </a:ln>
@@ -3830,7 +3830,7 @@
             <a:r>
               <a:rPr lang="en-US" sz="1500" dirty="0">
                 <a:solidFill>
-                  <a:srgbClr val="0E1230"/>
+                  <a:srgbClr val="161A24"/>
                 </a:solidFill>
                 <a:latin typeface="Inter" pitchFamily="34" charset="0"/>
                 <a:ea typeface="Inter" pitchFamily="34" charset="-122"/>
@@ -3869,7 +3869,7 @@
             <a:r>
               <a:rPr lang="en-US" sz="1100" dirty="0">
                 <a:solidFill>
-                  <a:srgbClr val="6B7087"/>
+                  <a:srgbClr val="5F6575"/>
                 </a:solidFill>
                 <a:latin typeface="Inter" pitchFamily="34" charset="0"/>
                 <a:ea typeface="Inter" pitchFamily="34" charset="-122"/>
@@ -3908,7 +3908,7 @@
             <a:r>
               <a:rPr lang="en-US" sz="1100" dirty="0">
                 <a:solidFill>
-                  <a:srgbClr val="6B7087"/>
+                  <a:srgbClr val="5F6575"/>
                 </a:solidFill>
                 <a:latin typeface="Inter" pitchFamily="34" charset="0"/>
                 <a:ea typeface="Inter" pitchFamily="34" charset="-122"/>
@@ -3954,7 +3954,7 @@
       </p:grpSpPr>
       <p:pic>
         <p:nvPicPr>
-          <p:cNvPr id="2" name="Image 0" descr="D:\startups\my-projects\DevUpProject\hirefromwebsite\public\images\deck\icons\ask.png">    </p:cNvPr>
+          <p:cNvPr id="2" name="Image 0" descr="C:\Users\Developer\Desktop\hirefromph\hirefromph\public\images\deck\icons\ask.png">    </p:cNvPr>
           <p:cNvPicPr>
             <a:picLocks noChangeAspect="1"/>
           </p:cNvPicPr>
@@ -4003,7 +4003,7 @@
             <a:r>
               <a:rPr lang="en-US" sz="1400" b="1" spc="300" kern="0" dirty="0">
                 <a:solidFill>
-                  <a:srgbClr val="4B4EF6"/>
+                  <a:srgbClr val="043882"/>
                 </a:solidFill>
                 <a:latin typeface="Inter" pitchFamily="34" charset="0"/>
                 <a:ea typeface="Inter" pitchFamily="34" charset="-122"/>
@@ -4045,7 +4045,7 @@
             <a:r>
               <a:rPr lang="en-US" sz="3800" b="1" dirty="0">
                 <a:solidFill>
-                  <a:srgbClr val="0E1230"/>
+                  <a:srgbClr val="161A24"/>
                 </a:solidFill>
                 <a:latin typeface="Inter" pitchFamily="34" charset="0"/>
                 <a:ea typeface="Inter" pitchFamily="34" charset="-122"/>
@@ -4089,7 +4089,7 @@
             <a:r>
               <a:rPr lang="en-US" sz="1700" dirty="0">
                 <a:solidFill>
-                  <a:srgbClr val="0E1230"/>
+                  <a:srgbClr val="161A24"/>
                 </a:solidFill>
                 <a:latin typeface="Inter" pitchFamily="34" charset="0"/>
                 <a:ea typeface="Inter" pitchFamily="34" charset="-122"/>
@@ -4111,7 +4111,7 @@
             <a:r>
               <a:rPr lang="en-US" sz="1700" dirty="0">
                 <a:solidFill>
-                  <a:srgbClr val="0E1230"/>
+                  <a:srgbClr val="161A24"/>
                 </a:solidFill>
                 <a:latin typeface="Inter" pitchFamily="34" charset="0"/>
                 <a:ea typeface="Inter" pitchFamily="34" charset="-122"/>
@@ -4133,7 +4133,7 @@
             <a:r>
               <a:rPr lang="en-US" sz="1700" dirty="0">
                 <a:solidFill>
-                  <a:srgbClr val="0E1230"/>
+                  <a:srgbClr val="161A24"/>
                 </a:solidFill>
                 <a:latin typeface="Inter" pitchFamily="34" charset="0"/>
                 <a:ea typeface="Inter" pitchFamily="34" charset="-122"/>
@@ -4160,11 +4160,11 @@
             <a:avLst/>
           </a:prstGeom>
           <a:solidFill>
-            <a:srgbClr val="EEEDFF"/>
+            <a:srgbClr val="EAF0FB"/>
           </a:solidFill>
           <a:ln w="12700">
             <a:solidFill>
-              <a:srgbClr val="EEEDFF"/>
+              <a:srgbClr val="EAF0FB"/>
             </a:solidFill>
             <a:prstDash val="solid"/>
           </a:ln>
@@ -4197,7 +4197,7 @@
             <a:r>
               <a:rPr lang="en-US" sz="1500" dirty="0">
                 <a:solidFill>
-                  <a:srgbClr val="0E1230"/>
+                  <a:srgbClr val="161A24"/>
                 </a:solidFill>
                 <a:latin typeface="Inter" pitchFamily="34" charset="0"/>
                 <a:ea typeface="Inter" pitchFamily="34" charset="-122"/>
@@ -4236,7 +4236,7 @@
             <a:r>
               <a:rPr lang="en-US" sz="1100" dirty="0">
                 <a:solidFill>
-                  <a:srgbClr val="6B7087"/>
+                  <a:srgbClr val="5F6575"/>
                 </a:solidFill>
                 <a:latin typeface="Inter" pitchFamily="34" charset="0"/>
                 <a:ea typeface="Inter" pitchFamily="34" charset="-122"/>
@@ -4275,7 +4275,7 @@
             <a:r>
               <a:rPr lang="en-US" sz="1100" dirty="0">
                 <a:solidFill>
-                  <a:srgbClr val="6B7087"/>
+                  <a:srgbClr val="5F6575"/>
                 </a:solidFill>
                 <a:latin typeface="Inter" pitchFamily="34" charset="0"/>
                 <a:ea typeface="Inter" pitchFamily="34" charset="-122"/>
@@ -4321,7 +4321,7 @@
       </p:grpSpPr>
       <p:pic>
         <p:nvPicPr>
-          <p:cNvPr id="2" name="Image 0" descr="D:\startups\my-projects\DevUpProject\hirefromwebsite\public\images\deck\icons\unstick.png">    </p:cNvPr>
+          <p:cNvPr id="2" name="Image 0" descr="C:\Users\Developer\Desktop\hirefromph\hirefromph\public\images\deck\icons\unstick.png">    </p:cNvPr>
           <p:cNvPicPr>
             <a:picLocks noChangeAspect="1"/>
           </p:cNvPicPr>
@@ -4370,7 +4370,7 @@
             <a:r>
               <a:rPr lang="en-US" sz="1400" b="1" spc="300" kern="0" dirty="0">
                 <a:solidFill>
-                  <a:srgbClr val="4B4EF6"/>
+                  <a:srgbClr val="043882"/>
                 </a:solidFill>
                 <a:latin typeface="Inter" pitchFamily="34" charset="0"/>
                 <a:ea typeface="Inter" pitchFamily="34" charset="-122"/>
@@ -4412,7 +4412,7 @@
             <a:r>
               <a:rPr lang="en-US" sz="3800" b="1" dirty="0">
                 <a:solidFill>
-                  <a:srgbClr val="0E1230"/>
+                  <a:srgbClr val="161A24"/>
                 </a:solidFill>
                 <a:latin typeface="Inter" pitchFamily="34" charset="0"/>
                 <a:ea typeface="Inter" pitchFamily="34" charset="-122"/>
@@ -4456,7 +4456,7 @@
             <a:r>
               <a:rPr lang="en-US" sz="1700" dirty="0">
                 <a:solidFill>
-                  <a:srgbClr val="0E1230"/>
+                  <a:srgbClr val="161A24"/>
                 </a:solidFill>
                 <a:latin typeface="Inter" pitchFamily="34" charset="0"/>
                 <a:ea typeface="Inter" pitchFamily="34" charset="-122"/>
@@ -4478,7 +4478,7 @@
             <a:r>
               <a:rPr lang="en-US" sz="1700" dirty="0">
                 <a:solidFill>
-                  <a:srgbClr val="0E1230"/>
+                  <a:srgbClr val="161A24"/>
                 </a:solidFill>
                 <a:latin typeface="Inter" pitchFamily="34" charset="0"/>
                 <a:ea typeface="Inter" pitchFamily="34" charset="-122"/>
@@ -4500,7 +4500,7 @@
             <a:r>
               <a:rPr lang="en-US" sz="1700" dirty="0">
                 <a:solidFill>
-                  <a:srgbClr val="0E1230"/>
+                  <a:srgbClr val="161A24"/>
                 </a:solidFill>
                 <a:latin typeface="Inter" pitchFamily="34" charset="0"/>
                 <a:ea typeface="Inter" pitchFamily="34" charset="-122"/>
@@ -4527,11 +4527,11 @@
             <a:avLst/>
           </a:prstGeom>
           <a:solidFill>
-            <a:srgbClr val="EEEDFF"/>
+            <a:srgbClr val="EAF0FB"/>
           </a:solidFill>
           <a:ln w="12700">
             <a:solidFill>
-              <a:srgbClr val="EEEDFF"/>
+              <a:srgbClr val="EAF0FB"/>
             </a:solidFill>
             <a:prstDash val="solid"/>
           </a:ln>
@@ -4564,7 +4564,7 @@
             <a:r>
               <a:rPr lang="en-US" sz="1500" dirty="0">
                 <a:solidFill>
-                  <a:srgbClr val="0E1230"/>
+                  <a:srgbClr val="161A24"/>
                 </a:solidFill>
                 <a:latin typeface="Inter" pitchFamily="34" charset="0"/>
                 <a:ea typeface="Inter" pitchFamily="34" charset="-122"/>
@@ -4603,7 +4603,7 @@
             <a:r>
               <a:rPr lang="en-US" sz="1100" dirty="0">
                 <a:solidFill>
-                  <a:srgbClr val="6B7087"/>
+                  <a:srgbClr val="5F6575"/>
                 </a:solidFill>
                 <a:latin typeface="Inter" pitchFamily="34" charset="0"/>
                 <a:ea typeface="Inter" pitchFamily="34" charset="-122"/>
@@ -4642,7 +4642,7 @@
             <a:r>
               <a:rPr lang="en-US" sz="1100" dirty="0">
                 <a:solidFill>
-                  <a:srgbClr val="6B7087"/>
+                  <a:srgbClr val="5F6575"/>
                 </a:solidFill>
                 <a:latin typeface="Inter" pitchFamily="34" charset="0"/>
                 <a:ea typeface="Inter" pitchFamily="34" charset="-122"/>
@@ -4688,7 +4688,7 @@
       </p:grpSpPr>
       <p:pic>
         <p:nvPicPr>
-          <p:cNvPr id="2" name="Image 0" descr="D:\startups\my-projects\DevUpProject\hirefromwebsite\public\images\deck\icons\give.png">    </p:cNvPr>
+          <p:cNvPr id="2" name="Image 0" descr="C:\Users\Developer\Desktop\hirefromph\hirefromph\public\images\deck\icons\give.png">    </p:cNvPr>
           <p:cNvPicPr>
             <a:picLocks noChangeAspect="1"/>
           </p:cNvPicPr>
@@ -4737,7 +4737,7 @@
             <a:r>
               <a:rPr lang="en-US" sz="1400" b="1" spc="300" kern="0" dirty="0">
                 <a:solidFill>
-                  <a:srgbClr val="4B4EF6"/>
+                  <a:srgbClr val="043882"/>
                 </a:solidFill>
                 <a:latin typeface="Inter" pitchFamily="34" charset="0"/>
                 <a:ea typeface="Inter" pitchFamily="34" charset="-122"/>
@@ -4779,7 +4779,7 @@
             <a:r>
               <a:rPr lang="en-US" sz="3800" b="1" dirty="0">
                 <a:solidFill>
-                  <a:srgbClr val="0E1230"/>
+                  <a:srgbClr val="161A24"/>
                 </a:solidFill>
                 <a:latin typeface="Inter" pitchFamily="34" charset="0"/>
                 <a:ea typeface="Inter" pitchFamily="34" charset="-122"/>
@@ -4823,7 +4823,7 @@
             <a:r>
               <a:rPr lang="en-US" sz="1700" dirty="0">
                 <a:solidFill>
-                  <a:srgbClr val="0E1230"/>
+                  <a:srgbClr val="161A24"/>
                 </a:solidFill>
                 <a:latin typeface="Inter" pitchFamily="34" charset="0"/>
                 <a:ea typeface="Inter" pitchFamily="34" charset="-122"/>
@@ -4845,7 +4845,7 @@
             <a:r>
               <a:rPr lang="en-US" sz="1700" dirty="0">
                 <a:solidFill>
-                  <a:srgbClr val="0E1230"/>
+                  <a:srgbClr val="161A24"/>
                 </a:solidFill>
                 <a:latin typeface="Inter" pitchFamily="34" charset="0"/>
                 <a:ea typeface="Inter" pitchFamily="34" charset="-122"/>
@@ -4867,7 +4867,7 @@
             <a:r>
               <a:rPr lang="en-US" sz="1700" dirty="0">
                 <a:solidFill>
-                  <a:srgbClr val="0E1230"/>
+                  <a:srgbClr val="161A24"/>
                 </a:solidFill>
                 <a:latin typeface="Inter" pitchFamily="34" charset="0"/>
                 <a:ea typeface="Inter" pitchFamily="34" charset="-122"/>
@@ -4894,11 +4894,11 @@
             <a:avLst/>
           </a:prstGeom>
           <a:solidFill>
-            <a:srgbClr val="EEEDFF"/>
+            <a:srgbClr val="EAF0FB"/>
           </a:solidFill>
           <a:ln w="12700">
             <a:solidFill>
-              <a:srgbClr val="EEEDFF"/>
+              <a:srgbClr val="EAF0FB"/>
             </a:solidFill>
             <a:prstDash val="solid"/>
           </a:ln>
@@ -4931,7 +4931,7 @@
             <a:r>
               <a:rPr lang="en-US" sz="1500" dirty="0">
                 <a:solidFill>
-                  <a:srgbClr val="0E1230"/>
+                  <a:srgbClr val="161A24"/>
                 </a:solidFill>
                 <a:latin typeface="Inter" pitchFamily="34" charset="0"/>
                 <a:ea typeface="Inter" pitchFamily="34" charset="-122"/>
@@ -4970,7 +4970,7 @@
             <a:r>
               <a:rPr lang="en-US" sz="1100" dirty="0">
                 <a:solidFill>
-                  <a:srgbClr val="6B7087"/>
+                  <a:srgbClr val="5F6575"/>
                 </a:solidFill>
                 <a:latin typeface="Inter" pitchFamily="34" charset="0"/>
                 <a:ea typeface="Inter" pitchFamily="34" charset="-122"/>
@@ -5009,7 +5009,7 @@
             <a:r>
               <a:rPr lang="en-US" sz="1100" dirty="0">
                 <a:solidFill>
-                  <a:srgbClr val="6B7087"/>
+                  <a:srgbClr val="5F6575"/>
                 </a:solidFill>
                 <a:latin typeface="Inter" pitchFamily="34" charset="0"/>
                 <a:ea typeface="Inter" pitchFamily="34" charset="-122"/>
@@ -5080,7 +5080,7 @@
             <a:r>
               <a:rPr lang="en-US" sz="1400" b="1" spc="300" kern="0" dirty="0">
                 <a:solidFill>
-                  <a:srgbClr val="4B4EF6"/>
+                  <a:srgbClr val="043882"/>
                 </a:solidFill>
                 <a:latin typeface="Inter" pitchFamily="34" charset="0"/>
                 <a:ea typeface="Inter" pitchFamily="34" charset="-122"/>
@@ -5122,7 +5122,7 @@
             <a:r>
               <a:rPr lang="en-US" sz="3200" b="1" dirty="0">
                 <a:solidFill>
-                  <a:srgbClr val="0E1230"/>
+                  <a:srgbClr val="161A24"/>
                 </a:solidFill>
                 <a:latin typeface="Inter" pitchFamily="34" charset="0"/>
                 <a:ea typeface="Inter" pitchFamily="34" charset="-122"/>
@@ -5164,7 +5164,7 @@
             <a:r>
               <a:rPr lang="en-US" sz="1700" dirty="0">
                 <a:solidFill>
-                  <a:srgbClr val="4A4F66"/>
+                  <a:srgbClr val="464C5C"/>
                 </a:solidFill>
                 <a:latin typeface="Inter" pitchFamily="34" charset="0"/>
                 <a:ea typeface="Inter" pitchFamily="34" charset="-122"/>
@@ -5178,7 +5178,7 @@
       </p:sp>
       <p:pic>
         <p:nvPicPr>
-          <p:cNvPr id="5" name="Image 0" descr="C:\Users\llino\AppData\Local\Temp\hfph-decks-hOWO7d\master-method-loop-diagram.png">    </p:cNvPr>
+          <p:cNvPr id="5" name="Image 0" descr="C:\Users\DEVELO~1\AppData\Local\Temp\hfph-decks-OLkhm9\master-method-loop-diagram.png">    </p:cNvPr>
           <p:cNvPicPr>
             <a:picLocks noChangeAspect="1"/>
           </p:cNvPicPr>
@@ -5226,7 +5226,7 @@
             <a:r>
               <a:rPr lang="en-US" sz="1100" dirty="0">
                 <a:solidFill>
-                  <a:srgbClr val="6B7087"/>
+                  <a:srgbClr val="5F6575"/>
                 </a:solidFill>
                 <a:latin typeface="Inter" pitchFamily="34" charset="0"/>
                 <a:ea typeface="Inter" pitchFamily="34" charset="-122"/>
@@ -5265,7 +5265,7 @@
             <a:r>
               <a:rPr lang="en-US" sz="1100" dirty="0">
                 <a:solidFill>
-                  <a:srgbClr val="6B7087"/>
+                  <a:srgbClr val="5F6575"/>
                 </a:solidFill>
                 <a:latin typeface="Inter" pitchFamily="34" charset="0"/>
                 <a:ea typeface="Inter" pitchFamily="34" charset="-122"/>
@@ -5291,7 +5291,7 @@
     <p:bg>
       <p:bgPr>
         <a:solidFill>
-          <a:srgbClr val="F7F6FF"/>
+          <a:srgbClr val="F3F4F6"/>
         </a:solidFill>
       </p:bgPr>
     </p:bg>
@@ -5336,7 +5336,7 @@
             <a:r>
               <a:rPr lang="en-US" sz="1400" b="1" spc="300" kern="0" dirty="0">
                 <a:solidFill>
-                  <a:srgbClr val="4B4EF6"/>
+                  <a:srgbClr val="043882"/>
                 </a:solidFill>
                 <a:latin typeface="Inter" pitchFamily="34" charset="0"/>
                 <a:ea typeface="Inter" pitchFamily="34" charset="-122"/>
@@ -5378,7 +5378,7 @@
             <a:r>
               <a:rPr lang="en-US" sz="3800" b="1" dirty="0">
                 <a:solidFill>
-                  <a:srgbClr val="0E1230"/>
+                  <a:srgbClr val="161A24"/>
                 </a:solidFill>
                 <a:latin typeface="Inter" pitchFamily="34" charset="0"/>
                 <a:ea typeface="Inter" pitchFamily="34" charset="-122"/>
@@ -5420,7 +5420,7 @@
             <a:r>
               <a:rPr lang="en-US" sz="1800" dirty="0">
                 <a:solidFill>
-                  <a:srgbClr val="4A4F66"/>
+                  <a:srgbClr val="464C5C"/>
                 </a:solidFill>
                 <a:latin typeface="Inter" pitchFamily="34" charset="0"/>
                 <a:ea typeface="Inter" pitchFamily="34" charset="-122"/>
@@ -5463,7 +5463,7 @@
             <a:r>
               <a:rPr lang="en-US" sz="1700" dirty="0">
                 <a:solidFill>
-                  <a:srgbClr val="0E1230"/>
+                  <a:srgbClr val="161A24"/>
                 </a:solidFill>
                 <a:latin typeface="Inter" pitchFamily="34" charset="0"/>
                 <a:ea typeface="Inter" pitchFamily="34" charset="-122"/>
@@ -5484,7 +5484,7 @@
             <a:r>
               <a:rPr lang="en-US" sz="1700" dirty="0">
                 <a:solidFill>
-                  <a:srgbClr val="0E1230"/>
+                  <a:srgbClr val="161A24"/>
                 </a:solidFill>
                 <a:latin typeface="Inter" pitchFamily="34" charset="0"/>
                 <a:ea typeface="Inter" pitchFamily="34" charset="-122"/>
@@ -5505,7 +5505,7 @@
             <a:r>
               <a:rPr lang="en-US" sz="1700" dirty="0">
                 <a:solidFill>
-                  <a:srgbClr val="0E1230"/>
+                  <a:srgbClr val="161A24"/>
                 </a:solidFill>
                 <a:latin typeface="Inter" pitchFamily="34" charset="0"/>
                 <a:ea typeface="Inter" pitchFamily="34" charset="-122"/>
@@ -5526,7 +5526,7 @@
             <a:r>
               <a:rPr lang="en-US" sz="1700" dirty="0">
                 <a:solidFill>
-                  <a:srgbClr val="0E1230"/>
+                  <a:srgbClr val="161A24"/>
                 </a:solidFill>
                 <a:latin typeface="Inter" pitchFamily="34" charset="0"/>
                 <a:ea typeface="Inter" pitchFamily="34" charset="-122"/>
@@ -5547,7 +5547,7 @@
             <a:r>
               <a:rPr lang="en-US" sz="1700" dirty="0">
                 <a:solidFill>
-                  <a:srgbClr val="0E1230"/>
+                  <a:srgbClr val="161A24"/>
                 </a:solidFill>
                 <a:latin typeface="Inter" pitchFamily="34" charset="0"/>
                 <a:ea typeface="Inter" pitchFamily="34" charset="-122"/>
@@ -5586,7 +5586,7 @@
             <a:r>
               <a:rPr lang="en-US" sz="1100" dirty="0">
                 <a:solidFill>
-                  <a:srgbClr val="6B7087"/>
+                  <a:srgbClr val="5F6575"/>
                 </a:solidFill>
                 <a:latin typeface="Inter" pitchFamily="34" charset="0"/>
                 <a:ea typeface="Inter" pitchFamily="34" charset="-122"/>
@@ -5625,7 +5625,7 @@
             <a:r>
               <a:rPr lang="en-US" sz="1100" dirty="0">
                 <a:solidFill>
-                  <a:srgbClr val="6B7087"/>
+                  <a:srgbClr val="5F6575"/>
                 </a:solidFill>
                 <a:latin typeface="Inter" pitchFamily="34" charset="0"/>
                 <a:ea typeface="Inter" pitchFamily="34" charset="-122"/>
@@ -5651,7 +5651,7 @@
     <p:bg>
       <p:bgPr>
         <a:solidFill>
-          <a:srgbClr val="F7F6FF"/>
+          <a:srgbClr val="F3F4F6"/>
         </a:solidFill>
       </p:bgPr>
     </p:bg>
@@ -5696,7 +5696,7 @@
             <a:r>
               <a:rPr lang="en-US" sz="1400" b="1" spc="300" kern="0" dirty="0">
                 <a:solidFill>
-                  <a:srgbClr val="4B4EF6"/>
+                  <a:srgbClr val="043882"/>
                 </a:solidFill>
                 <a:latin typeface="Inter" pitchFamily="34" charset="0"/>
                 <a:ea typeface="Inter" pitchFamily="34" charset="-122"/>
@@ -5738,7 +5738,7 @@
             <a:r>
               <a:rPr lang="en-US" sz="3800" b="1" dirty="0">
                 <a:solidFill>
-                  <a:srgbClr val="0E1230"/>
+                  <a:srgbClr val="161A24"/>
                 </a:solidFill>
                 <a:latin typeface="Inter" pitchFamily="34" charset="0"/>
                 <a:ea typeface="Inter" pitchFamily="34" charset="-122"/>
@@ -5780,7 +5780,7 @@
             <a:r>
               <a:rPr lang="en-US" sz="1800" dirty="0">
                 <a:solidFill>
-                  <a:srgbClr val="4A4F66"/>
+                  <a:srgbClr val="464C5C"/>
                 </a:solidFill>
                 <a:latin typeface="Inter" pitchFamily="34" charset="0"/>
                 <a:ea typeface="Inter" pitchFamily="34" charset="-122"/>
@@ -5823,7 +5823,7 @@
             <a:r>
               <a:rPr lang="en-US" sz="1700" dirty="0">
                 <a:solidFill>
-                  <a:srgbClr val="0E1230"/>
+                  <a:srgbClr val="161A24"/>
                 </a:solidFill>
                 <a:latin typeface="Inter" pitchFamily="34" charset="0"/>
                 <a:ea typeface="Inter" pitchFamily="34" charset="-122"/>
@@ -5844,7 +5844,7 @@
             <a:r>
               <a:rPr lang="en-US" sz="1700" dirty="0">
                 <a:solidFill>
-                  <a:srgbClr val="0E1230"/>
+                  <a:srgbClr val="161A24"/>
                 </a:solidFill>
                 <a:latin typeface="Inter" pitchFamily="34" charset="0"/>
                 <a:ea typeface="Inter" pitchFamily="34" charset="-122"/>
@@ -5865,7 +5865,7 @@
             <a:r>
               <a:rPr lang="en-US" sz="1700" dirty="0">
                 <a:solidFill>
-                  <a:srgbClr val="0E1230"/>
+                  <a:srgbClr val="161A24"/>
                 </a:solidFill>
                 <a:latin typeface="Inter" pitchFamily="34" charset="0"/>
                 <a:ea typeface="Inter" pitchFamily="34" charset="-122"/>
@@ -5886,7 +5886,7 @@
             <a:r>
               <a:rPr lang="en-US" sz="1700" dirty="0">
                 <a:solidFill>
-                  <a:srgbClr val="0E1230"/>
+                  <a:srgbClr val="161A24"/>
                 </a:solidFill>
                 <a:latin typeface="Inter" pitchFamily="34" charset="0"/>
                 <a:ea typeface="Inter" pitchFamily="34" charset="-122"/>
@@ -5907,7 +5907,7 @@
             <a:r>
               <a:rPr lang="en-US" sz="1700" dirty="0">
                 <a:solidFill>
-                  <a:srgbClr val="0E1230"/>
+                  <a:srgbClr val="161A24"/>
                 </a:solidFill>
                 <a:latin typeface="Inter" pitchFamily="34" charset="0"/>
                 <a:ea typeface="Inter" pitchFamily="34" charset="-122"/>
@@ -5946,7 +5946,7 @@
             <a:r>
               <a:rPr lang="en-US" sz="1100" dirty="0">
                 <a:solidFill>
-                  <a:srgbClr val="6B7087"/>
+                  <a:srgbClr val="5F6575"/>
                 </a:solidFill>
                 <a:latin typeface="Inter" pitchFamily="34" charset="0"/>
                 <a:ea typeface="Inter" pitchFamily="34" charset="-122"/>
@@ -5985,7 +5985,7 @@
             <a:r>
               <a:rPr lang="en-US" sz="1100" dirty="0">
                 <a:solidFill>
-                  <a:srgbClr val="6B7087"/>
+                  <a:srgbClr val="5F6575"/>
                 </a:solidFill>
                 <a:latin typeface="Inter" pitchFamily="34" charset="0"/>
                 <a:ea typeface="Inter" pitchFamily="34" charset="-122"/>
@@ -6011,7 +6011,7 @@
     <p:bg>
       <p:bgPr>
         <a:solidFill>
-          <a:srgbClr val="0E1230"/>
+          <a:srgbClr val="161A24"/>
         </a:solidFill>
       </p:bgPr>
     </p:bg>
@@ -6031,7 +6031,7 @@
       </p:grpSpPr>
       <p:pic>
         <p:nvPicPr>
-          <p:cNvPr id="2" name="Image 0" descr="D:\startups\my-projects\DevUpProject\hirefromwebsite\public\images\deck-close.jpg">    </p:cNvPr>
+          <p:cNvPr id="2" name="Image 0" descr="C:\Users\Developer\Desktop\hirefromph\hirefromph\public\images\deck-close.jpg">    </p:cNvPr>
           <p:cNvPicPr>
             <a:picLocks noChangeAspect="1"/>
           </p:cNvPicPr>
@@ -6067,13 +6067,13 @@
             <a:avLst/>
           </a:prstGeom>
           <a:solidFill>
-            <a:srgbClr val="0E1230">
+            <a:srgbClr val="161A24">
               <a:alpha val="72000"/>
             </a:srgbClr>
           </a:solidFill>
           <a:ln w="12700">
             <a:solidFill>
-              <a:srgbClr val="0E1230">
+              <a:srgbClr val="161A24">
                 <a:alpha val="0"/>
               </a:srgbClr>
             </a:solidFill>
@@ -6108,7 +6108,7 @@
             <a:r>
               <a:rPr lang="en-US" sz="1400" b="1" spc="300" kern="0" dirty="0">
                 <a:solidFill>
-                  <a:srgbClr val="C9C8FF"/>
+                  <a:srgbClr val="AFC5EE"/>
                 </a:solidFill>
                 <a:latin typeface="Inter" pitchFamily="34" charset="0"/>
                 <a:ea typeface="Inter" pitchFamily="34" charset="-122"/>
@@ -6192,7 +6192,7 @@
             <a:r>
               <a:rPr lang="en-US" sz="2200" dirty="0">
                 <a:solidFill>
-                  <a:srgbClr val="D6D7EA"/>
+                  <a:srgbClr val="EAF0FB"/>
                 </a:solidFill>
                 <a:latin typeface="Inter" pitchFamily="34" charset="0"/>
                 <a:ea typeface="Inter" pitchFamily="34" charset="-122"/>
@@ -6231,7 +6231,7 @@
             <a:r>
               <a:rPr lang="en-US" sz="1100" dirty="0">
                 <a:solidFill>
-                  <a:srgbClr val="D6D7EA"/>
+                  <a:srgbClr val="EAF0FB"/>
                 </a:solidFill>
                 <a:latin typeface="Inter" pitchFamily="34" charset="0"/>
                 <a:ea typeface="Inter" pitchFamily="34" charset="-122"/>
@@ -6270,7 +6270,7 @@
             <a:r>
               <a:rPr lang="en-US" sz="1100" dirty="0">
                 <a:solidFill>
-                  <a:srgbClr val="D6D7EA"/>
+                  <a:srgbClr val="EAF0FB"/>
                 </a:solidFill>
                 <a:latin typeface="Inter" pitchFamily="34" charset="0"/>
                 <a:ea typeface="Inter" pitchFamily="34" charset="-122"/>
@@ -6296,7 +6296,7 @@
     <p:bg>
       <p:bgPr>
         <a:solidFill>
-          <a:srgbClr val="0E1230"/>
+          <a:srgbClr val="161A24"/>
         </a:solidFill>
       </p:bgPr>
     </p:bg>
@@ -6316,7 +6316,7 @@
       </p:grpSpPr>
       <p:pic>
         <p:nvPicPr>
-          <p:cNvPr id="2" name="Image 0" descr="D:\startups\my-projects\DevUpProject\hirefromwebsite\public\images\deck-why.jpg">    </p:cNvPr>
+          <p:cNvPr id="2" name="Image 0" descr="C:\Users\Developer\Desktop\hirefromph\hirefromph\public\images\deck-why.jpg">    </p:cNvPr>
           <p:cNvPicPr>
             <a:picLocks noChangeAspect="1"/>
           </p:cNvPicPr>
@@ -6352,13 +6352,13 @@
             <a:avLst/>
           </a:prstGeom>
           <a:solidFill>
-            <a:srgbClr val="0E1230">
+            <a:srgbClr val="161A24">
               <a:alpha val="72000"/>
             </a:srgbClr>
           </a:solidFill>
           <a:ln w="12700">
             <a:solidFill>
-              <a:srgbClr val="0E1230">
+              <a:srgbClr val="161A24">
                 <a:alpha val="0"/>
               </a:srgbClr>
             </a:solidFill>
@@ -6393,7 +6393,7 @@
             <a:r>
               <a:rPr lang="en-US" sz="1400" b="1" spc="300" kern="0" dirty="0">
                 <a:solidFill>
-                  <a:srgbClr val="C9C8FF"/>
+                  <a:srgbClr val="AFC5EE"/>
                 </a:solidFill>
                 <a:latin typeface="Inter" pitchFamily="34" charset="0"/>
                 <a:ea typeface="Inter" pitchFamily="34" charset="-122"/>
@@ -6477,7 +6477,7 @@
             <a:r>
               <a:rPr lang="en-US" sz="2200" dirty="0">
                 <a:solidFill>
-                  <a:srgbClr val="D6D7EA"/>
+                  <a:srgbClr val="EAF0FB"/>
                 </a:solidFill>
                 <a:latin typeface="Inter" pitchFamily="34" charset="0"/>
                 <a:ea typeface="Inter" pitchFamily="34" charset="-122"/>
@@ -6516,7 +6516,7 @@
             <a:r>
               <a:rPr lang="en-US" sz="1100" dirty="0">
                 <a:solidFill>
-                  <a:srgbClr val="D6D7EA"/>
+                  <a:srgbClr val="EAF0FB"/>
                 </a:solidFill>
                 <a:latin typeface="Inter" pitchFamily="34" charset="0"/>
                 <a:ea typeface="Inter" pitchFamily="34" charset="-122"/>
@@ -6555,7 +6555,7 @@
             <a:r>
               <a:rPr lang="en-US" sz="1100" dirty="0">
                 <a:solidFill>
-                  <a:srgbClr val="D6D7EA"/>
+                  <a:srgbClr val="EAF0FB"/>
                 </a:solidFill>
                 <a:latin typeface="Inter" pitchFamily="34" charset="0"/>
                 <a:ea typeface="Inter" pitchFamily="34" charset="-122"/>
@@ -6581,7 +6581,7 @@
     <p:bg>
       <p:bgPr>
         <a:solidFill>
-          <a:srgbClr val="0E1230"/>
+          <a:srgbClr val="161A24"/>
         </a:solidFill>
       </p:bgPr>
     </p:bg>
@@ -6626,7 +6626,7 @@
             <a:r>
               <a:rPr lang="en-US" sz="1400" b="1" spc="300" kern="0" dirty="0">
                 <a:solidFill>
-                  <a:srgbClr val="C9C8FF"/>
+                  <a:srgbClr val="AFC5EE"/>
                 </a:solidFill>
                 <a:latin typeface="Inter" pitchFamily="34" charset="0"/>
                 <a:ea typeface="Inter" pitchFamily="34" charset="-122"/>
@@ -6710,7 +6710,7 @@
             <a:r>
               <a:rPr lang="en-US" sz="2200" dirty="0">
                 <a:solidFill>
-                  <a:srgbClr val="D6D7EA"/>
+                  <a:srgbClr val="EAF0FB"/>
                 </a:solidFill>
                 <a:latin typeface="Inter" pitchFamily="34" charset="0"/>
                 <a:ea typeface="Inter" pitchFamily="34" charset="-122"/>
@@ -6749,7 +6749,7 @@
             <a:r>
               <a:rPr lang="en-US" sz="1100" dirty="0">
                 <a:solidFill>
-                  <a:srgbClr val="D6D7EA"/>
+                  <a:srgbClr val="EAF0FB"/>
                 </a:solidFill>
                 <a:latin typeface="Inter" pitchFamily="34" charset="0"/>
                 <a:ea typeface="Inter" pitchFamily="34" charset="-122"/>
@@ -6788,7 +6788,7 @@
             <a:r>
               <a:rPr lang="en-US" sz="1100" dirty="0">
                 <a:solidFill>
-                  <a:srgbClr val="D6D7EA"/>
+                  <a:srgbClr val="EAF0FB"/>
                 </a:solidFill>
                 <a:latin typeface="Inter" pitchFamily="34" charset="0"/>
                 <a:ea typeface="Inter" pitchFamily="34" charset="-122"/>
@@ -6859,7 +6859,7 @@
             <a:r>
               <a:rPr lang="en-US" sz="1400" b="1" spc="300" kern="0" dirty="0">
                 <a:solidFill>
-                  <a:srgbClr val="4B4EF6"/>
+                  <a:srgbClr val="043882"/>
                 </a:solidFill>
                 <a:latin typeface="Inter" pitchFamily="34" charset="0"/>
                 <a:ea typeface="Inter" pitchFamily="34" charset="-122"/>
@@ -6901,7 +6901,7 @@
             <a:r>
               <a:rPr lang="en-US" sz="4600" b="1" dirty="0">
                 <a:solidFill>
-                  <a:srgbClr val="0E1230"/>
+                  <a:srgbClr val="161A24"/>
                 </a:solidFill>
                 <a:latin typeface="Inter" pitchFamily="34" charset="0"/>
                 <a:ea typeface="Inter" pitchFamily="34" charset="-122"/>
@@ -6943,7 +6943,7 @@
             <a:r>
               <a:rPr lang="en-US" sz="2000" dirty="0">
                 <a:solidFill>
-                  <a:srgbClr val="4A4F66"/>
+                  <a:srgbClr val="464C5C"/>
                 </a:solidFill>
                 <a:latin typeface="Inter" pitchFamily="34" charset="0"/>
                 <a:ea typeface="Inter" pitchFamily="34" charset="-122"/>
@@ -6982,7 +6982,7 @@
             <a:r>
               <a:rPr lang="en-US" sz="1100" dirty="0">
                 <a:solidFill>
-                  <a:srgbClr val="6B7087"/>
+                  <a:srgbClr val="5F6575"/>
                 </a:solidFill>
                 <a:latin typeface="Inter" pitchFamily="34" charset="0"/>
                 <a:ea typeface="Inter" pitchFamily="34" charset="-122"/>
@@ -7021,7 +7021,7 @@
             <a:r>
               <a:rPr lang="en-US" sz="1100" dirty="0">
                 <a:solidFill>
-                  <a:srgbClr val="6B7087"/>
+                  <a:srgbClr val="5F6575"/>
                 </a:solidFill>
                 <a:latin typeface="Inter" pitchFamily="34" charset="0"/>
                 <a:ea typeface="Inter" pitchFamily="34" charset="-122"/>
@@ -7092,7 +7092,7 @@
             <a:r>
               <a:rPr lang="en-US" sz="1400" b="1" spc="300" kern="0" dirty="0">
                 <a:solidFill>
-                  <a:srgbClr val="4B4EF6"/>
+                  <a:srgbClr val="043882"/>
                 </a:solidFill>
                 <a:latin typeface="Inter" pitchFamily="34" charset="0"/>
                 <a:ea typeface="Inter" pitchFamily="34" charset="-122"/>
@@ -7134,7 +7134,7 @@
             <a:r>
               <a:rPr lang="en-US" sz="4600" b="1" dirty="0">
                 <a:solidFill>
-                  <a:srgbClr val="0E1230"/>
+                  <a:srgbClr val="161A24"/>
                 </a:solidFill>
                 <a:latin typeface="Inter" pitchFamily="34" charset="0"/>
                 <a:ea typeface="Inter" pitchFamily="34" charset="-122"/>
@@ -7176,7 +7176,7 @@
             <a:r>
               <a:rPr lang="en-US" sz="2000" dirty="0">
                 <a:solidFill>
-                  <a:srgbClr val="4A4F66"/>
+                  <a:srgbClr val="464C5C"/>
                 </a:solidFill>
                 <a:latin typeface="Inter" pitchFamily="34" charset="0"/>
                 <a:ea typeface="Inter" pitchFamily="34" charset="-122"/>
@@ -7215,7 +7215,7 @@
             <a:r>
               <a:rPr lang="en-US" sz="1100" dirty="0">
                 <a:solidFill>
-                  <a:srgbClr val="6B7087"/>
+                  <a:srgbClr val="5F6575"/>
                 </a:solidFill>
                 <a:latin typeface="Inter" pitchFamily="34" charset="0"/>
                 <a:ea typeface="Inter" pitchFamily="34" charset="-122"/>
@@ -7254,7 +7254,7 @@
             <a:r>
               <a:rPr lang="en-US" sz="1100" dirty="0">
                 <a:solidFill>
-                  <a:srgbClr val="6B7087"/>
+                  <a:srgbClr val="5F6575"/>
                 </a:solidFill>
                 <a:latin typeface="Inter" pitchFamily="34" charset="0"/>
                 <a:ea typeface="Inter" pitchFamily="34" charset="-122"/>
@@ -7280,7 +7280,7 @@
     <p:bg>
       <p:bgPr>
         <a:solidFill>
-          <a:srgbClr val="0E1230"/>
+          <a:srgbClr val="161A24"/>
         </a:solidFill>
       </p:bgPr>
     </p:bg>
@@ -7300,7 +7300,7 @@
       </p:grpSpPr>
       <p:pic>
         <p:nvPicPr>
-          <p:cNvPr id="2" name="Image 0" descr="D:\startups\my-projects\DevUpProject\hirefromwebsite\public\images\deck-path.jpg">    </p:cNvPr>
+          <p:cNvPr id="2" name="Image 0" descr="C:\Users\Developer\Desktop\hirefromph\hirefromph\public\images\deck-path.jpg">    </p:cNvPr>
           <p:cNvPicPr>
             <a:picLocks noChangeAspect="1"/>
           </p:cNvPicPr>
@@ -7336,13 +7336,13 @@
             <a:avLst/>
           </a:prstGeom>
           <a:solidFill>
-            <a:srgbClr val="0E1230">
+            <a:srgbClr val="161A24">
               <a:alpha val="72000"/>
             </a:srgbClr>
           </a:solidFill>
           <a:ln w="12700">
             <a:solidFill>
-              <a:srgbClr val="0E1230">
+              <a:srgbClr val="161A24">
                 <a:alpha val="0"/>
               </a:srgbClr>
             </a:solidFill>
@@ -7377,7 +7377,7 @@
             <a:r>
               <a:rPr lang="en-US" sz="1400" b="1" spc="300" kern="0" dirty="0">
                 <a:solidFill>
-                  <a:srgbClr val="C9C8FF"/>
+                  <a:srgbClr val="AFC5EE"/>
                 </a:solidFill>
                 <a:latin typeface="Inter" pitchFamily="34" charset="0"/>
                 <a:ea typeface="Inter" pitchFamily="34" charset="-122"/>
@@ -7461,7 +7461,7 @@
             <a:r>
               <a:rPr lang="en-US" sz="2200" dirty="0">
                 <a:solidFill>
-                  <a:srgbClr val="D6D7EA"/>
+                  <a:srgbClr val="EAF0FB"/>
                 </a:solidFill>
                 <a:latin typeface="Inter" pitchFamily="34" charset="0"/>
                 <a:ea typeface="Inter" pitchFamily="34" charset="-122"/>
@@ -7500,7 +7500,7 @@
             <a:r>
               <a:rPr lang="en-US" sz="1100" dirty="0">
                 <a:solidFill>
-                  <a:srgbClr val="D6D7EA"/>
+                  <a:srgbClr val="EAF0FB"/>
                 </a:solidFill>
                 <a:latin typeface="Inter" pitchFamily="34" charset="0"/>
                 <a:ea typeface="Inter" pitchFamily="34" charset="-122"/>
@@ -7539,7 +7539,7 @@
             <a:r>
               <a:rPr lang="en-US" sz="1100" dirty="0">
                 <a:solidFill>
-                  <a:srgbClr val="D6D7EA"/>
+                  <a:srgbClr val="EAF0FB"/>
                 </a:solidFill>
                 <a:latin typeface="Inter" pitchFamily="34" charset="0"/>
                 <a:ea typeface="Inter" pitchFamily="34" charset="-122"/>
@@ -7610,7 +7610,7 @@
             <a:r>
               <a:rPr lang="en-US" sz="1400" b="1" spc="300" kern="0" dirty="0">
                 <a:solidFill>
-                  <a:srgbClr val="4B4EF6"/>
+                  <a:srgbClr val="043882"/>
                 </a:solidFill>
                 <a:latin typeface="Inter" pitchFamily="34" charset="0"/>
                 <a:ea typeface="Inter" pitchFamily="34" charset="-122"/>
@@ -7652,7 +7652,7 @@
             <a:r>
               <a:rPr lang="en-US" sz="3200" b="1" dirty="0">
                 <a:solidFill>
-                  <a:srgbClr val="0E1230"/>
+                  <a:srgbClr val="161A24"/>
                 </a:solidFill>
                 <a:latin typeface="Inter" pitchFamily="34" charset="0"/>
                 <a:ea typeface="Inter" pitchFamily="34" charset="-122"/>
@@ -7694,7 +7694,7 @@
             <a:r>
               <a:rPr lang="en-US" sz="1700" dirty="0">
                 <a:solidFill>
-                  <a:srgbClr val="4A4F66"/>
+                  <a:srgbClr val="464C5C"/>
                 </a:solidFill>
                 <a:latin typeface="Inter" pitchFamily="34" charset="0"/>
                 <a:ea typeface="Inter" pitchFamily="34" charset="-122"/>
@@ -7708,7 +7708,7 @@
       </p:sp>
       <p:pic>
         <p:nvPicPr>
-          <p:cNvPr id="5" name="Image 0" descr="C:\Users\llino\AppData\Local\Temp\hfph-decks-hOWO7d\master-five-stages-diagram.png">    </p:cNvPr>
+          <p:cNvPr id="5" name="Image 0" descr="C:\Users\DEVELO~1\AppData\Local\Temp\hfph-decks-OLkhm9\master-five-stages-diagram.png">    </p:cNvPr>
           <p:cNvPicPr>
             <a:picLocks noChangeAspect="1"/>
           </p:cNvPicPr>
@@ -7756,7 +7756,7 @@
             <a:r>
               <a:rPr lang="en-US" sz="1100" dirty="0">
                 <a:solidFill>
-                  <a:srgbClr val="6B7087"/>
+                  <a:srgbClr val="5F6575"/>
                 </a:solidFill>
                 <a:latin typeface="Inter" pitchFamily="34" charset="0"/>
                 <a:ea typeface="Inter" pitchFamily="34" charset="-122"/>
@@ -7795,7 +7795,7 @@
             <a:r>
               <a:rPr lang="en-US" sz="1100" dirty="0">
                 <a:solidFill>
-                  <a:srgbClr val="6B7087"/>
+                  <a:srgbClr val="5F6575"/>
                 </a:solidFill>
                 <a:latin typeface="Inter" pitchFamily="34" charset="0"/>
                 <a:ea typeface="Inter" pitchFamily="34" charset="-122"/>
@@ -7821,7 +7821,7 @@
     <p:bg>
       <p:bgPr>
         <a:solidFill>
-          <a:srgbClr val="F7F6FF"/>
+          <a:srgbClr val="F3F4F6"/>
         </a:solidFill>
       </p:bgPr>
     </p:bg>
@@ -7866,7 +7866,7 @@
             <a:r>
               <a:rPr lang="en-US" sz="1400" b="1" spc="300" kern="0" dirty="0">
                 <a:solidFill>
-                  <a:srgbClr val="4B4EF6"/>
+                  <a:srgbClr val="043882"/>
                 </a:solidFill>
                 <a:latin typeface="Inter" pitchFamily="34" charset="0"/>
                 <a:ea typeface="Inter" pitchFamily="34" charset="-122"/>
@@ -7908,7 +7908,7 @@
             <a:r>
               <a:rPr lang="en-US" sz="3800" b="1" dirty="0">
                 <a:solidFill>
-                  <a:srgbClr val="0E1230"/>
+                  <a:srgbClr val="161A24"/>
                 </a:solidFill>
                 <a:latin typeface="Inter" pitchFamily="34" charset="0"/>
                 <a:ea typeface="Inter" pitchFamily="34" charset="-122"/>
@@ -7950,7 +7950,7 @@
             <a:r>
               <a:rPr lang="en-US" sz="1800" dirty="0">
                 <a:solidFill>
-                  <a:srgbClr val="4A4F66"/>
+                  <a:srgbClr val="464C5C"/>
                 </a:solidFill>
                 <a:latin typeface="Inter" pitchFamily="34" charset="0"/>
                 <a:ea typeface="Inter" pitchFamily="34" charset="-122"/>
@@ -7993,7 +7993,7 @@
             <a:r>
               <a:rPr lang="en-US" sz="1700" dirty="0">
                 <a:solidFill>
-                  <a:srgbClr val="0E1230"/>
+                  <a:srgbClr val="161A24"/>
                 </a:solidFill>
                 <a:latin typeface="Inter" pitchFamily="34" charset="0"/>
                 <a:ea typeface="Inter" pitchFamily="34" charset="-122"/>
@@ -8014,7 +8014,7 @@
             <a:r>
               <a:rPr lang="en-US" sz="1700" dirty="0">
                 <a:solidFill>
-                  <a:srgbClr val="0E1230"/>
+                  <a:srgbClr val="161A24"/>
                 </a:solidFill>
                 <a:latin typeface="Inter" pitchFamily="34" charset="0"/>
                 <a:ea typeface="Inter" pitchFamily="34" charset="-122"/>
@@ -8035,7 +8035,7 @@
             <a:r>
               <a:rPr lang="en-US" sz="1700" dirty="0">
                 <a:solidFill>
-                  <a:srgbClr val="0E1230"/>
+                  <a:srgbClr val="161A24"/>
                 </a:solidFill>
                 <a:latin typeface="Inter" pitchFamily="34" charset="0"/>
                 <a:ea typeface="Inter" pitchFamily="34" charset="-122"/>
@@ -8056,7 +8056,7 @@
             <a:r>
               <a:rPr lang="en-US" sz="1700" dirty="0">
                 <a:solidFill>
-                  <a:srgbClr val="0E1230"/>
+                  <a:srgbClr val="161A24"/>
                 </a:solidFill>
                 <a:latin typeface="Inter" pitchFamily="34" charset="0"/>
                 <a:ea typeface="Inter" pitchFamily="34" charset="-122"/>
@@ -8077,7 +8077,7 @@
             <a:r>
               <a:rPr lang="en-US" sz="1700" dirty="0">
                 <a:solidFill>
-                  <a:srgbClr val="0E1230"/>
+                  <a:srgbClr val="161A24"/>
                 </a:solidFill>
                 <a:latin typeface="Inter" pitchFamily="34" charset="0"/>
                 <a:ea typeface="Inter" pitchFamily="34" charset="-122"/>
@@ -8116,7 +8116,7 @@
             <a:r>
               <a:rPr lang="en-US" sz="1100" dirty="0">
                 <a:solidFill>
-                  <a:srgbClr val="6B7087"/>
+                  <a:srgbClr val="5F6575"/>
                 </a:solidFill>
                 <a:latin typeface="Inter" pitchFamily="34" charset="0"/>
                 <a:ea typeface="Inter" pitchFamily="34" charset="-122"/>
@@ -8155,7 +8155,7 @@
             <a:r>
               <a:rPr lang="en-US" sz="1100" dirty="0">
                 <a:solidFill>
-                  <a:srgbClr val="6B7087"/>
+                  <a:srgbClr val="5F6575"/>
                 </a:solidFill>
                 <a:latin typeface="Inter" pitchFamily="34" charset="0"/>
                 <a:ea typeface="Inter" pitchFamily="34" charset="-122"/>
@@ -8181,7 +8181,7 @@
     <p:bg>
       <p:bgPr>
         <a:solidFill>
-          <a:srgbClr val="0E1230"/>
+          <a:srgbClr val="161A24"/>
         </a:solidFill>
       </p:bgPr>
     </p:bg>
@@ -8201,7 +8201,7 @@
       </p:grpSpPr>
       <p:pic>
         <p:nvPicPr>
-          <p:cNvPr id="2" name="Image 0" descr="D:\startups\my-projects\DevUpProject\hirefromwebsite\public\images\deck-methods.jpg">    </p:cNvPr>
+          <p:cNvPr id="2" name="Image 0" descr="C:\Users\Developer\Desktop\hirefromph\hirefromph\public\images\deck-methods.jpg">    </p:cNvPr>
           <p:cNvPicPr>
             <a:picLocks noChangeAspect="1"/>
           </p:cNvPicPr>
@@ -8237,13 +8237,13 @@
             <a:avLst/>
           </a:prstGeom>
           <a:solidFill>
-            <a:srgbClr val="0E1230">
+            <a:srgbClr val="161A24">
               <a:alpha val="72000"/>
             </a:srgbClr>
           </a:solidFill>
           <a:ln w="12700">
             <a:solidFill>
-              <a:srgbClr val="0E1230">
+              <a:srgbClr val="161A24">
                 <a:alpha val="0"/>
               </a:srgbClr>
             </a:solidFill>
@@ -8278,7 +8278,7 @@
             <a:r>
               <a:rPr lang="en-US" sz="1400" b="1" spc="300" kern="0" dirty="0">
                 <a:solidFill>
-                  <a:srgbClr val="C9C8FF"/>
+                  <a:srgbClr val="AFC5EE"/>
                 </a:solidFill>
                 <a:latin typeface="Inter" pitchFamily="34" charset="0"/>
                 <a:ea typeface="Inter" pitchFamily="34" charset="-122"/>
@@ -8362,7 +8362,7 @@
             <a:r>
               <a:rPr lang="en-US" sz="2200" dirty="0">
                 <a:solidFill>
-                  <a:srgbClr val="D6D7EA"/>
+                  <a:srgbClr val="EAF0FB"/>
                 </a:solidFill>
                 <a:latin typeface="Inter" pitchFamily="34" charset="0"/>
                 <a:ea typeface="Inter" pitchFamily="34" charset="-122"/>
@@ -8401,7 +8401,7 @@
             <a:r>
               <a:rPr lang="en-US" sz="1100" dirty="0">
                 <a:solidFill>
-                  <a:srgbClr val="D6D7EA"/>
+                  <a:srgbClr val="EAF0FB"/>
                 </a:solidFill>
                 <a:latin typeface="Inter" pitchFamily="34" charset="0"/>
                 <a:ea typeface="Inter" pitchFamily="34" charset="-122"/>
@@ -8440,7 +8440,7 @@
             <a:r>
               <a:rPr lang="en-US" sz="1100" dirty="0">
                 <a:solidFill>
-                  <a:srgbClr val="D6D7EA"/>
+                  <a:srgbClr val="EAF0FB"/>
                 </a:solidFill>
                 <a:latin typeface="Inter" pitchFamily="34" charset="0"/>
                 <a:ea typeface="Inter" pitchFamily="34" charset="-122"/>
@@ -8486,7 +8486,7 @@
       </p:grpSpPr>
       <p:pic>
         <p:nvPicPr>
-          <p:cNvPr id="2" name="Image 0" descr="D:\startups\my-projects\DevUpProject\hirefromwebsite\public\images\deck\icons\find.png">    </p:cNvPr>
+          <p:cNvPr id="2" name="Image 0" descr="C:\Users\Developer\Desktop\hirefromph\hirefromph\public\images\deck\icons\find.png">    </p:cNvPr>
           <p:cNvPicPr>
             <a:picLocks noChangeAspect="1"/>
           </p:cNvPicPr>
@@ -8535,7 +8535,7 @@
             <a:r>
               <a:rPr lang="en-US" sz="1400" b="1" spc="300" kern="0" dirty="0">
                 <a:solidFill>
-                  <a:srgbClr val="4B4EF6"/>
+                  <a:srgbClr val="043882"/>
                 </a:solidFill>
                 <a:latin typeface="Inter" pitchFamily="34" charset="0"/>
                 <a:ea typeface="Inter" pitchFamily="34" charset="-122"/>
@@ -8577,7 +8577,7 @@
             <a:r>
               <a:rPr lang="en-US" sz="3800" b="1" dirty="0">
                 <a:solidFill>
-                  <a:srgbClr val="0E1230"/>
+                  <a:srgbClr val="161A24"/>
                 </a:solidFill>
                 <a:latin typeface="Inter" pitchFamily="34" charset="0"/>
                 <a:ea typeface="Inter" pitchFamily="34" charset="-122"/>
@@ -8621,7 +8621,7 @@
             <a:r>
               <a:rPr lang="en-US" sz="1700" dirty="0">
                 <a:solidFill>
-                  <a:srgbClr val="0E1230"/>
+                  <a:srgbClr val="161A24"/>
                 </a:solidFill>
                 <a:latin typeface="Inter" pitchFamily="34" charset="0"/>
                 <a:ea typeface="Inter" pitchFamily="34" charset="-122"/>
@@ -8643,7 +8643,7 @@
             <a:r>
               <a:rPr lang="en-US" sz="1700" dirty="0">
                 <a:solidFill>
-                  <a:srgbClr val="0E1230"/>
+                  <a:srgbClr val="161A24"/>
                 </a:solidFill>
                 <a:latin typeface="Inter" pitchFamily="34" charset="0"/>
                 <a:ea typeface="Inter" pitchFamily="34" charset="-122"/>
@@ -8665,7 +8665,7 @@
             <a:r>
               <a:rPr lang="en-US" sz="1700" dirty="0">
                 <a:solidFill>
-                  <a:srgbClr val="0E1230"/>
+                  <a:srgbClr val="161A24"/>
                 </a:solidFill>
                 <a:latin typeface="Inter" pitchFamily="34" charset="0"/>
                 <a:ea typeface="Inter" pitchFamily="34" charset="-122"/>
@@ -8692,11 +8692,11 @@
             <a:avLst/>
           </a:prstGeom>
           <a:solidFill>
-            <a:srgbClr val="EEEDFF"/>
+            <a:srgbClr val="EAF0FB"/>
           </a:solidFill>
           <a:ln w="12700">
             <a:solidFill>
-              <a:srgbClr val="EEEDFF"/>
+              <a:srgbClr val="EAF0FB"/>
             </a:solidFill>
             <a:prstDash val="solid"/>
           </a:ln>
@@ -8729,7 +8729,7 @@
             <a:r>
               <a:rPr lang="en-US" sz="1500" dirty="0">
                 <a:solidFill>
-                  <a:srgbClr val="0E1230"/>
+                  <a:srgbClr val="161A24"/>
                 </a:solidFill>
                 <a:latin typeface="Inter" pitchFamily="34" charset="0"/>
                 <a:ea typeface="Inter" pitchFamily="34" charset="-122"/>
@@ -8768,7 +8768,7 @@
             <a:r>
               <a:rPr lang="en-US" sz="1100" dirty="0">
                 <a:solidFill>
-                  <a:srgbClr val="6B7087"/>
+                  <a:srgbClr val="5F6575"/>
                 </a:solidFill>
                 <a:latin typeface="Inter" pitchFamily="34" charset="0"/>
                 <a:ea typeface="Inter" pitchFamily="34" charset="-122"/>
@@ -8807,7 +8807,7 @@
             <a:r>
               <a:rPr lang="en-US" sz="1100" dirty="0">
                 <a:solidFill>
-                  <a:srgbClr val="6B7087"/>
+                  <a:srgbClr val="5F6575"/>
                 </a:solidFill>
                 <a:latin typeface="Inter" pitchFamily="34" charset="0"/>
                 <a:ea typeface="Inter" pitchFamily="34" charset="-122"/>
